--- a/public/fun/pack/pptx/news/카드뉴스_20_오늘의한마디_소나기지난뒤.pptx
+++ b/public/fun/pack/pptx/news/카드뉴스_20_오늘의한마디_소나기지난뒤.pptx
@@ -3348,7 +3348,7 @@
             <a:r>
               <a:rPr sz="3000" b="1" i="0">
                 <a:solidFill>
-                  <a:srgbClr val="23535C"/>
+                  <a:srgbClr val="11525F"/>
                 </a:solidFill>
               </a:rPr>
               <a:t>퇴근길 한 정거장 걷기</a:t>
@@ -3386,7 +3386,7 @@
             <a:r>
               <a:rPr sz="1500" b="0" i="1">
                 <a:solidFill>
-                  <a:srgbClr val="23535C"/>
+                  <a:srgbClr val="11525F"/>
                 </a:solidFill>
               </a:rPr>
               <a:t>옆으로 넘겨 보세요 →</a:t>
@@ -3446,7 +3446,7 @@
     <p:bg>
       <p:bgPr>
         <a:solidFill>
-          <a:srgbClr val="F0F8F9"/>
+          <a:srgbClr val="EEFAFC"/>
         </a:solidFill>
         <a:effectLst/>
       </p:bgPr>
@@ -3473,7 +3473,7 @@
             <a:avLst/>
           </a:prstGeom>
           <a:solidFill>
-            <a:srgbClr val="D1EBF0"/>
+            <a:srgbClr val="D1F3FA"/>
           </a:solidFill>
           <a:ln>
             <a:noFill/>
@@ -3502,7 +3502,7 @@
             <a:avLst/>
           </a:prstGeom>
           <a:solidFill>
-            <a:srgbClr val="3F95A6"/>
+            <a:srgbClr val="26AAC5"/>
           </a:solidFill>
           <a:ln>
             <a:noFill/>
@@ -3546,7 +3546,7 @@
             <a:r>
               <a:rPr sz="2600" b="1" i="0">
                 <a:solidFill>
-                  <a:srgbClr val="23535C"/>
+                  <a:srgbClr val="11525F"/>
                 </a:solidFill>
               </a:rPr>
               <a:t>점심은 거르지 마세요</a:t>
@@ -3584,7 +3584,7 @@
             <a:r>
               <a:rPr sz="6600" b="1" i="0">
                 <a:solidFill>
-                  <a:srgbClr val="3F95A6"/>
+                  <a:srgbClr val="26AAC5"/>
                 </a:solidFill>
               </a:rPr>
               <a:t>01</a:t>
@@ -3682,7 +3682,7 @@
     <p:bg>
       <p:bgPr>
         <a:solidFill>
-          <a:srgbClr val="F0F8F9"/>
+          <a:srgbClr val="EEFAFC"/>
         </a:solidFill>
         <a:effectLst/>
       </p:bgPr>
@@ -3709,7 +3709,7 @@
             <a:avLst/>
           </a:prstGeom>
           <a:solidFill>
-            <a:srgbClr val="D1EBF0"/>
+            <a:srgbClr val="D1F3FA"/>
           </a:solidFill>
           <a:ln>
             <a:noFill/>
@@ -3738,7 +3738,7 @@
             <a:avLst/>
           </a:prstGeom>
           <a:solidFill>
-            <a:srgbClr val="3F95A6"/>
+            <a:srgbClr val="26AAC5"/>
           </a:solidFill>
           <a:ln>
             <a:noFill/>
@@ -3782,7 +3782,7 @@
             <a:r>
               <a:rPr sz="2600" b="1" i="0">
                 <a:solidFill>
-                  <a:srgbClr val="23535C"/>
+                  <a:srgbClr val="11525F"/>
                 </a:solidFill>
               </a:rPr>
               <a:t>전화 한 통 걸어 보세요</a:t>
@@ -3820,7 +3820,7 @@
             <a:r>
               <a:rPr sz="6600" b="1" i="0">
                 <a:solidFill>
-                  <a:srgbClr val="3F95A6"/>
+                  <a:srgbClr val="26AAC5"/>
                 </a:solidFill>
               </a:rPr>
               <a:t>02</a:t>
@@ -3918,7 +3918,7 @@
     <p:bg>
       <p:bgPr>
         <a:solidFill>
-          <a:srgbClr val="F0F8F9"/>
+          <a:srgbClr val="EEFAFC"/>
         </a:solidFill>
         <a:effectLst/>
       </p:bgPr>
@@ -3945,7 +3945,7 @@
             <a:avLst/>
           </a:prstGeom>
           <a:solidFill>
-            <a:srgbClr val="D1EBF0"/>
+            <a:srgbClr val="D1F3FA"/>
           </a:solidFill>
           <a:ln>
             <a:noFill/>
@@ -3974,7 +3974,7 @@
             <a:avLst/>
           </a:prstGeom>
           <a:solidFill>
-            <a:srgbClr val="3F95A6"/>
+            <a:srgbClr val="26AAC5"/>
           </a:solidFill>
           <a:ln>
             <a:noFill/>
@@ -4018,7 +4018,7 @@
             <a:r>
               <a:rPr sz="2600" b="1" i="0">
                 <a:solidFill>
-                  <a:srgbClr val="23535C"/>
+                  <a:srgbClr val="11525F"/>
                 </a:solidFill>
               </a:rPr>
               <a:t>메모 한 장 남기기</a:t>
@@ -4056,7 +4056,7 @@
             <a:r>
               <a:rPr sz="6600" b="1" i="0">
                 <a:solidFill>
-                  <a:srgbClr val="3F95A6"/>
+                  <a:srgbClr val="26AAC5"/>
                 </a:solidFill>
               </a:rPr>
               <a:t>03</a:t>
@@ -4154,7 +4154,7 @@
     <p:bg>
       <p:bgPr>
         <a:solidFill>
-          <a:srgbClr val="F0F8F9"/>
+          <a:srgbClr val="EEFAFC"/>
         </a:solidFill>
         <a:effectLst/>
       </p:bgPr>
@@ -4181,7 +4181,7 @@
             <a:avLst/>
           </a:prstGeom>
           <a:solidFill>
-            <a:srgbClr val="D1EBF0"/>
+            <a:srgbClr val="D1F3FA"/>
           </a:solidFill>
           <a:ln>
             <a:noFill/>
@@ -4210,7 +4210,7 @@
             <a:avLst/>
           </a:prstGeom>
           <a:solidFill>
-            <a:srgbClr val="3F95A6"/>
+            <a:srgbClr val="26AAC5"/>
           </a:solidFill>
           <a:ln>
             <a:noFill/>
@@ -4254,7 +4254,7 @@
             <a:r>
               <a:rPr sz="2600" b="1" i="0">
                 <a:solidFill>
-                  <a:srgbClr val="23535C"/>
+                  <a:srgbClr val="11525F"/>
                 </a:solidFill>
               </a:rPr>
               <a:t>퇴근길 한 정거장 걷기</a:t>
@@ -4292,7 +4292,7 @@
             <a:r>
               <a:rPr sz="6600" b="1" i="0">
                 <a:solidFill>
-                  <a:srgbClr val="3F95A6"/>
+                  <a:srgbClr val="26AAC5"/>
                 </a:solidFill>
               </a:rPr>
               <a:t>04</a:t>
@@ -4390,7 +4390,7 @@
     <p:bg>
       <p:bgPr>
         <a:solidFill>
-          <a:srgbClr val="F0F8F9"/>
+          <a:srgbClr val="EEFAFC"/>
         </a:solidFill>
         <a:effectLst/>
       </p:bgPr>
@@ -4417,7 +4417,7 @@
             <a:avLst/>
           </a:prstGeom>
           <a:solidFill>
-            <a:srgbClr val="D1EBF0"/>
+            <a:srgbClr val="D1F3FA"/>
           </a:solidFill>
           <a:ln>
             <a:noFill/>
@@ -4446,7 +4446,7 @@
             <a:avLst/>
           </a:prstGeom>
           <a:solidFill>
-            <a:srgbClr val="3F95A6"/>
+            <a:srgbClr val="26AAC5"/>
           </a:solidFill>
           <a:ln>
             <a:noFill/>
@@ -4490,7 +4490,7 @@
             <a:r>
               <a:rPr sz="2600" b="1" i="0">
                 <a:solidFill>
-                  <a:srgbClr val="23535C"/>
+                  <a:srgbClr val="11525F"/>
                 </a:solidFill>
               </a:rPr>
               <a:t>오늘은 일찍 자기</a:t>
@@ -4528,7 +4528,7 @@
             <a:r>
               <a:rPr sz="6600" b="1" i="0">
                 <a:solidFill>
-                  <a:srgbClr val="3F95A6"/>
+                  <a:srgbClr val="26AAC5"/>
                 </a:solidFill>
               </a:rPr>
               <a:t>05</a:t>
@@ -4684,7 +4684,7 @@
             <a:r>
               <a:rPr sz="2800" b="1" i="0">
                 <a:solidFill>
-                  <a:srgbClr val="23535C"/>
+                  <a:srgbClr val="11525F"/>
                 </a:solidFill>
               </a:rPr>
               <a:t>저장해 두고 필요할 때 꺼내 보세요</a:t>
@@ -4722,7 +4722,7 @@
             <a:r>
               <a:rPr sz="1500" b="0" i="1">
                 <a:solidFill>
-                  <a:srgbClr val="23535C"/>
+                  <a:srgbClr val="11525F"/>
                 </a:solidFill>
               </a:rPr>
               <a:t>마음에 들면 공유해 주세요</a:t>
@@ -4787,34 +4787,34 @@
         <a:sysClr val="window" lastClr="FFFFFF"/>
       </a:lt1>
       <a:dk2>
-        <a:srgbClr val="23535C"/>
+        <a:srgbClr val="11525F"/>
       </a:dk2>
       <a:lt2>
-        <a:srgbClr val="F0F8F9"/>
+        <a:srgbClr val="EEFAFC"/>
       </a:lt2>
       <a:accent1>
-        <a:srgbClr val="3F95A6"/>
+        <a:srgbClr val="26AAC5"/>
       </a:accent1>
       <a:accent2>
-        <a:srgbClr val="913B58"/>
+        <a:srgbClr val="209DB6"/>
       </a:accent2>
       <a:accent3>
-        <a:srgbClr val="23535C"/>
+        <a:srgbClr val="11525F"/>
       </a:accent3>
       <a:accent4>
-        <a:srgbClr val="D1EBF0"/>
+        <a:srgbClr val="D1F3FA"/>
       </a:accent4>
       <a:accent5>
-        <a:srgbClr val="68687F"/>
+        <a:srgbClr val="23A4BE"/>
       </a:accent5>
       <a:accent6>
-        <a:srgbClr val="7B989D"/>
+        <a:srgbClr val="70979F"/>
       </a:accent6>
       <a:hlink>
-        <a:srgbClr val="3F95A6"/>
+        <a:srgbClr val="26AAC5"/>
       </a:hlink>
       <a:folHlink>
-        <a:srgbClr val="23535C"/>
+        <a:srgbClr val="11525F"/>
       </a:folHlink>
     </a:clrScheme>
     <a:fontScheme name="Office">
